--- a/Week 3/Experiment 3 Measurement of Pi and Density (3).pptx
+++ b/Week 3/Experiment 3 Measurement of Pi and Density (3).pptx
@@ -928,7 +928,7 @@
             <a:fld id="{B61BEF0D-F0BB-DE4B-95CE-6DB70DBA9567}" type="datetimeFigureOut">
               <a:rPr lang="en-US" dirty="0"/>
               <a:pPr/>
-              <a:t>2/3/2026</a:t>
+              <a:t>9/11/2026</a:t>
             </a:fld>
             <a:endParaRPr lang="en-US" dirty="0"/>
           </a:p>
@@ -1176,7 +1176,7 @@
             <a:fld id="{B61BEF0D-F0BB-DE4B-95CE-6DB70DBA9567}" type="datetimeFigureOut">
               <a:rPr lang="en-US" dirty="0"/>
               <a:pPr/>
-              <a:t>2/3/2026</a:t>
+              <a:t>9/11/2026</a:t>
             </a:fld>
             <a:endParaRPr lang="en-US" dirty="0"/>
           </a:p>
@@ -1487,7 +1487,7 @@
             <a:fld id="{B61BEF0D-F0BB-DE4B-95CE-6DB70DBA9567}" type="datetimeFigureOut">
               <a:rPr lang="en-US" dirty="0"/>
               <a:pPr/>
-              <a:t>2/3/2026</a:t>
+              <a:t>9/11/2026</a:t>
             </a:fld>
             <a:endParaRPr lang="en-US" dirty="0"/>
           </a:p>
@@ -1817,7 +1817,7 @@
             <a:fld id="{B61BEF0D-F0BB-DE4B-95CE-6DB70DBA9567}" type="datetimeFigureOut">
               <a:rPr lang="en-US" dirty="0"/>
               <a:pPr/>
-              <a:t>2/3/2026</a:t>
+              <a:t>9/11/2026</a:t>
             </a:fld>
             <a:endParaRPr lang="en-US" dirty="0"/>
           </a:p>
@@ -2128,7 +2128,7 @@
             <a:fld id="{B61BEF0D-F0BB-DE4B-95CE-6DB70DBA9567}" type="datetimeFigureOut">
               <a:rPr lang="en-US" dirty="0"/>
               <a:pPr/>
-              <a:t>2/3/2026</a:t>
+              <a:t>9/11/2026</a:t>
             </a:fld>
             <a:endParaRPr lang="en-US" dirty="0"/>
           </a:p>
@@ -2518,7 +2518,7 @@
             <a:fld id="{B61BEF0D-F0BB-DE4B-95CE-6DB70DBA9567}" type="datetimeFigureOut">
               <a:rPr lang="en-US" dirty="0"/>
               <a:pPr/>
-              <a:t>2/3/2026</a:t>
+              <a:t>9/11/2026</a:t>
             </a:fld>
             <a:endParaRPr lang="en-US" dirty="0"/>
           </a:p>
@@ -2684,7 +2684,7 @@
           <a:p>
             <a:fld id="{55C6B4A9-1611-4792-9094-5F34BCA07E0B}" type="datetimeFigureOut">
               <a:rPr lang="en-US" dirty="0"/>
-              <a:t>2/3/2026</a:t>
+              <a:t>9/11/2026</a:t>
             </a:fld>
             <a:endParaRPr lang="en-US" dirty="0"/>
           </a:p>
@@ -2860,7 +2860,7 @@
             <a:fld id="{B61BEF0D-F0BB-DE4B-95CE-6DB70DBA9567}" type="datetimeFigureOut">
               <a:rPr lang="en-US" dirty="0"/>
               <a:pPr/>
-              <a:t>2/3/2026</a:t>
+              <a:t>9/11/2026</a:t>
             </a:fld>
             <a:endParaRPr lang="en-US" dirty="0"/>
           </a:p>
@@ -3026,7 +3026,7 @@
           <a:p>
             <a:fld id="{42A54C80-263E-416B-A8E0-580EDEADCBDC}" type="datetimeFigureOut">
               <a:rPr lang="en-US" dirty="0"/>
-              <a:t>2/3/2026</a:t>
+              <a:t>9/11/2026</a:t>
             </a:fld>
             <a:endParaRPr lang="en-US" dirty="0"/>
           </a:p>
@@ -3269,7 +3269,7 @@
             <a:fld id="{B61BEF0D-F0BB-DE4B-95CE-6DB70DBA9567}" type="datetimeFigureOut">
               <a:rPr lang="en-US" dirty="0"/>
               <a:pPr/>
-              <a:t>2/3/2026</a:t>
+              <a:t>9/11/2026</a:t>
             </a:fld>
             <a:endParaRPr lang="en-US" dirty="0"/>
           </a:p>
@@ -3497,7 +3497,7 @@
           <a:p>
             <a:fld id="{42A54C80-263E-416B-A8E0-580EDEADCBDC}" type="datetimeFigureOut">
               <a:rPr lang="en-US" dirty="0"/>
-              <a:t>2/3/2026</a:t>
+              <a:t>9/11/2026</a:t>
             </a:fld>
             <a:endParaRPr lang="en-US" dirty="0"/>
           </a:p>
@@ -3867,7 +3867,7 @@
             <a:fld id="{B61BEF0D-F0BB-DE4B-95CE-6DB70DBA9567}" type="datetimeFigureOut">
               <a:rPr lang="en-US" dirty="0"/>
               <a:pPr/>
-              <a:t>2/3/2026</a:t>
+              <a:t>9/11/2026</a:t>
             </a:fld>
             <a:endParaRPr lang="en-US" dirty="0"/>
           </a:p>
@@ -3987,7 +3987,7 @@
             <a:fld id="{B61BEF0D-F0BB-DE4B-95CE-6DB70DBA9567}" type="datetimeFigureOut">
               <a:rPr lang="en-US" dirty="0"/>
               <a:pPr/>
-              <a:t>2/3/2026</a:t>
+              <a:t>9/11/2026</a:t>
             </a:fld>
             <a:endParaRPr lang="en-US" dirty="0"/>
           </a:p>
@@ -4079,7 +4079,7 @@
             <a:fld id="{B61BEF0D-F0BB-DE4B-95CE-6DB70DBA9567}" type="datetimeFigureOut">
               <a:rPr lang="en-US" dirty="0"/>
               <a:pPr/>
-              <a:t>2/3/2026</a:t>
+              <a:t>9/11/2026</a:t>
             </a:fld>
             <a:endParaRPr lang="en-US" dirty="0"/>
           </a:p>
@@ -4330,7 +4330,7 @@
           <a:p>
             <a:fld id="{42A54C80-263E-416B-A8E0-580EDEADCBDC}" type="datetimeFigureOut">
               <a:rPr lang="en-US" dirty="0"/>
-              <a:t>2/3/2026</a:t>
+              <a:t>9/11/2026</a:t>
             </a:fld>
             <a:endParaRPr lang="en-US" dirty="0"/>
           </a:p>
@@ -4631,7 +4631,7 @@
             <a:fld id="{B61BEF0D-F0BB-DE4B-95CE-6DB70DBA9567}" type="datetimeFigureOut">
               <a:rPr lang="en-US" dirty="0"/>
               <a:pPr/>
-              <a:t>2/3/2026</a:t>
+              <a:t>9/11/2026</a:t>
             </a:fld>
             <a:endParaRPr lang="en-US" dirty="0"/>
           </a:p>
@@ -5385,7 +5385,7 @@
             <a:fld id="{B61BEF0D-F0BB-DE4B-95CE-6DB70DBA9567}" type="datetimeFigureOut">
               <a:rPr lang="en-US" dirty="0"/>
               <a:pPr/>
-              <a:t>2/3/2026</a:t>
+              <a:t>9/11/2026</a:t>
             </a:fld>
             <a:endParaRPr lang="en-US" dirty="0"/>
           </a:p>
@@ -6245,8 +6245,8 @@
           </a:p>
         </p:txBody>
       </p:sp>
-      <mc:AlternateContent xmlns:mc="http://schemas.openxmlformats.org/markup-compatibility/2006">
-        <mc:Choice xmlns:a14="http://schemas.microsoft.com/office/drawing/2010/main" Requires="a14">
+      <mc:AlternateContent xmlns:mc="http://schemas.openxmlformats.org/markup-compatibility/2006" xmlns:a14="http://schemas.microsoft.com/office/drawing/2010/main">
+        <mc:Choice Requires="a14">
           <p:sp>
             <p:nvSpPr>
               <p:cNvPr id="3" name="Content Placeholder 2"/>
@@ -6787,7 +6787,7 @@
             </p:txBody>
           </p:sp>
         </mc:Choice>
-        <mc:Fallback>
+        <mc:Fallback xmlns="">
           <p:sp>
             <p:nvSpPr>
               <p:cNvPr id="3" name="Content Placeholder 2"/>
@@ -9321,7 +9321,7 @@
                         </a:spcAft>
                       </a:pPr>
                       <a:r>
-                        <a:rPr lang="en-US" sz="1400">
+                        <a:rPr lang="en-US" sz="1400" dirty="0">
                           <a:solidFill>
                             <a:schemeClr val="tx1"/>
                           </a:solidFill>
@@ -9329,7 +9329,7 @@
                         </a:rPr>
                         <a:t>2</a:t>
                       </a:r>
-                      <a:endParaRPr lang="en-US" sz="1400">
+                      <a:endParaRPr lang="en-US" sz="1400" dirty="0">
                         <a:solidFill>
                           <a:schemeClr val="tx1"/>
                         </a:solidFill>
@@ -10890,12 +10890,23 @@
                 </a14:m>
                 <a:r>
                   <a:rPr lang="en-US" dirty="0"/>
-                  <a:t>. Use the accepted value of 3.1416 or excel function, Pi() for </a:t>
+                  <a:t>. </a:t>
+                </a:r>
+                <a:r>
+                  <a:rPr lang="en-US" dirty="0">
+                    <a:highlight>
+                      <a:srgbClr val="FFFF00"/>
+                    </a:highlight>
+                  </a:rPr>
+                  <a:t>Use the accepted value of 3.1416 or excel function, Pi() for </a:t>
                 </a:r>
                 <a14:m>
                   <m:oMath xmlns:m="http://schemas.openxmlformats.org/officeDocument/2006/math">
                     <m:r>
                       <a:rPr lang="en-US" i="1" dirty="0">
+                        <a:highlight>
+                          <a:srgbClr val="FFFF00"/>
+                        </a:highlight>
                         <a:latin typeface="Cambria Math" panose="02040503050406030204" pitchFamily="18" charset="0"/>
                         <a:ea typeface="Cambria Math" panose="02040503050406030204" pitchFamily="18" charset="0"/>
                       </a:rPr>
@@ -10904,13 +10915,20 @@
                   </m:oMath>
                 </a14:m>
                 <a:r>
-                  <a:rPr lang="en-US" dirty="0"/>
+                  <a:rPr lang="en-US" dirty="0">
+                    <a:highlight>
+                      <a:srgbClr val="FFFF00"/>
+                    </a:highlight>
+                  </a:rPr>
                   <a:t> when calculating </a:t>
                 </a:r>
                 <a14:m>
                   <m:oMath xmlns:m="http://schemas.openxmlformats.org/officeDocument/2006/math">
                     <m:r>
                       <a:rPr lang="en-US" i="1" dirty="0">
+                        <a:highlight>
+                          <a:srgbClr val="FFFF00"/>
+                        </a:highlight>
                         <a:latin typeface="Cambria Math" panose="02040503050406030204" pitchFamily="18" charset="0"/>
                         <a:ea typeface="Cambria Math" panose="02040503050406030204" pitchFamily="18" charset="0"/>
                       </a:rPr>
@@ -10919,7 +10937,11 @@
                   </m:oMath>
                 </a14:m>
                 <a:r>
-                  <a:rPr lang="en-US" dirty="0"/>
+                  <a:rPr lang="en-US" dirty="0">
+                    <a:highlight>
+                      <a:srgbClr val="FFFF00"/>
+                    </a:highlight>
+                  </a:rPr>
                   <a:t> values. </a:t>
                 </a:r>
               </a:p>
@@ -11207,15 +11229,7 @@
                 </a14:m>
                 <a:r>
                   <a:rPr lang="en-US" dirty="0"/>
-                  <a:t> values compare with the accepted value (3.1416)? Report % 	discrepancy and </a:t>
-                </a:r>
-                <a:r>
-                  <a:rPr lang="en-US"/>
-                  <a:t>% difference </a:t>
-                </a:r>
-                <a:r>
-                  <a:rPr lang="en-US" dirty="0"/>
-                  <a:t>from your spreadsheet.</a:t>
+                  <a:t> values compare with the accepted value (3.1416)? Report % 	discrepancy and % difference from your spreadsheet.</a:t>
                 </a:r>
               </a:p>
               <a:p>
@@ -11888,6 +11902,15 @@
 </file>
 
 <file path=customXml/item2.xml><?xml version="1.0" encoding="utf-8"?>
+<?mso-contentType ?>
+<FormTemplates xmlns="http://schemas.microsoft.com/sharepoint/v3/contenttype/forms">
+  <Display>DocumentLibraryForm</Display>
+  <Edit>DocumentLibraryForm</Edit>
+  <New>DocumentLibraryForm</New>
+</FormTemplates>
+</file>
+
+<file path=customXml/item3.xml><?xml version="1.0" encoding="utf-8"?>
 <ct:contentTypeSchema xmlns:ct="http://schemas.microsoft.com/office/2006/metadata/contentType" xmlns:ma="http://schemas.microsoft.com/office/2006/metadata/properties/metaAttributes" ct:_="" ma:_="" ma:contentTypeName="Document" ma:contentTypeID="0x01010071F712DCF4E89E4CBCEEA755EF81E88A" ma:contentTypeVersion="14" ma:contentTypeDescription="Create a new document." ma:contentTypeScope="" ma:versionID="320b06b9f9ec334549f95c39935f75f4">
   <xsd:schema xmlns:xsd="http://www.w3.org/2001/XMLSchema" xmlns:xs="http://www.w3.org/2001/XMLSchema" xmlns:p="http://schemas.microsoft.com/office/2006/metadata/properties" xmlns:ns3="4a651b0c-7ca9-450b-9469-de02b14c7408" xmlns:ns4="f6a62fc0-733e-42ba-a4be-6c891c8a1bad" targetNamespace="http://schemas.microsoft.com/office/2006/metadata/properties" ma:root="true" ma:fieldsID="fe10c24339d7c470f32f716063de2098" ns3:_="" ns4:_="">
     <xsd:import namespace="4a651b0c-7ca9-450b-9469-de02b14c7408"/>
@@ -12116,15 +12139,6 @@
 </ct:contentTypeSchema>
 </file>
 
-<file path=customXml/item3.xml><?xml version="1.0" encoding="utf-8"?>
-<?mso-contentType ?>
-<FormTemplates xmlns="http://schemas.microsoft.com/sharepoint/v3/contenttype/forms">
-  <Display>DocumentLibraryForm</Display>
-  <Edit>DocumentLibraryForm</Edit>
-  <New>DocumentLibraryForm</New>
-</FormTemplates>
-</file>
-
 <file path=customXml/itemProps1.xml><?xml version="1.0" encoding="utf-8"?>
 <ds:datastoreItem xmlns:ds="http://schemas.openxmlformats.org/officeDocument/2006/customXml" ds:itemID="{81446552-B557-46B8-BEC4-D4B459FF8DDC}">
   <ds:schemaRefs>
@@ -12143,6 +12157,14 @@
 </file>
 
 <file path=customXml/itemProps2.xml><?xml version="1.0" encoding="utf-8"?>
+<ds:datastoreItem xmlns:ds="http://schemas.openxmlformats.org/officeDocument/2006/customXml" ds:itemID="{7225624F-0EAC-4094-AA61-F8B3C677E67B}">
+  <ds:schemaRefs>
+    <ds:schemaRef ds:uri="http://schemas.microsoft.com/sharepoint/v3/contenttype/forms"/>
+  </ds:schemaRefs>
+</ds:datastoreItem>
+</file>
+
+<file path=customXml/itemProps3.xml><?xml version="1.0" encoding="utf-8"?>
 <ds:datastoreItem xmlns:ds="http://schemas.openxmlformats.org/officeDocument/2006/customXml" ds:itemID="{6AB93822-2944-4290-B4C6-D777A931F92B}">
   <ds:schemaRefs>
     <ds:schemaRef ds:uri="http://schemas.microsoft.com/office/2006/metadata/contentType"/>
@@ -12159,12 +12181,4 @@
     <ds:schemaRef ds:uri="http://schemas.microsoft.com/internal/obd"/>
   </ds:schemaRefs>
 </ds:datastoreItem>
-</file>
-
-<file path=customXml/itemProps3.xml><?xml version="1.0" encoding="utf-8"?>
-<ds:datastoreItem xmlns:ds="http://schemas.openxmlformats.org/officeDocument/2006/customXml" ds:itemID="{7225624F-0EAC-4094-AA61-F8B3C677E67B}">
-  <ds:schemaRefs>
-    <ds:schemaRef ds:uri="http://schemas.microsoft.com/sharepoint/v3/contenttype/forms"/>
-  </ds:schemaRefs>
-</ds:datastoreItem>
 </file>